--- a/course/slides/AF-TRACKF-M01/AF-TRACKF-M01-v1.pptx
+++ b/course/slides/AF-TRACKF-M01/AF-TRACKF-M01-v1.pptx
@@ -9628,7 +9628,7 @@
         </p:blipFill>
         <p:spPr>
           <a:xfrm>
-            <a:off x="609600" y="3185160"/>
+            <a:off x="609600" y="3020060"/>
             <a:ext cx="1016000" cy="1016000"/>
           </a:xfrm>
           <a:prstGeom prst="rect">
@@ -9644,7 +9644,7 @@
         </p:nvSpPr>
         <p:spPr>
           <a:xfrm>
-            <a:off x="2070100" y="3147060"/>
+            <a:off x="2070100" y="2981960"/>
             <a:ext cx="9563100" cy="619760"/>
           </a:xfrm>
           <a:prstGeom prst="rect">
@@ -9683,8 +9683,8 @@
         </p:nvSpPr>
         <p:spPr>
           <a:xfrm>
-            <a:off x="2070100" y="3931920"/>
-            <a:ext cx="9563100" cy="355600"/>
+            <a:off x="2070100" y="3766820"/>
+            <a:ext cx="9563100" cy="685800"/>
           </a:xfrm>
           <a:prstGeom prst="rect">
             <a:avLst/>
@@ -9709,7 +9709,23 @@
                 </a:solidFill>
                 <a:latin typeface="Lexend"/>
               </a:rPr>
-              <a:t>These questions are called the 20 codes.</a:t>
+              <a:t>A code is a short name for one question about how the app handles</a:t>
+            </a:r>
+          </a:p>
+          <a:p>
+            <a:pPr algn="l">
+              <a:lnSpc>
+                <a:spcPts val="2600"/>
+              </a:lnSpc>
+            </a:pPr>
+            <a:r>
+              <a:rPr sz="2000" b="0">
+                <a:solidFill>
+                  <a:srgbClr val="756E65"/>
+                </a:solidFill>
+                <a:latin typeface="Lexend"/>
+              </a:rPr>
+              <a:t>businesses, people and data.</a:t>
             </a:r>
           </a:p>
         </p:txBody>
@@ -10601,7 +10617,7 @@
                 </a:solidFill>
                 <a:latin typeface="Lexend"/>
               </a:rPr>
-              <a:t>Group 1 is Businesses.</a:t>
+              <a:t>TEN (0-6) asks how many businesses use the app and who sits above them.</a:t>
             </a:r>
           </a:p>
         </p:txBody>
@@ -10966,7 +10982,7 @@
         </p:blipFill>
         <p:spPr>
           <a:xfrm>
-            <a:off x="609600" y="3185160"/>
+            <a:off x="609600" y="3020060"/>
             <a:ext cx="1016000" cy="1016000"/>
           </a:xfrm>
           <a:prstGeom prst="rect">
@@ -10982,7 +10998,7 @@
         </p:nvSpPr>
         <p:spPr>
           <a:xfrm>
-            <a:off x="2070100" y="3147060"/>
+            <a:off x="2070100" y="2981960"/>
             <a:ext cx="9563100" cy="619760"/>
           </a:xfrm>
           <a:prstGeom prst="rect">
@@ -11021,8 +11037,8 @@
         </p:nvSpPr>
         <p:spPr>
           <a:xfrm>
-            <a:off x="2070100" y="3931920"/>
-            <a:ext cx="9563100" cy="355600"/>
+            <a:off x="2070100" y="3766820"/>
+            <a:ext cx="9563100" cy="685800"/>
           </a:xfrm>
           <a:prstGeom prst="rect">
             <a:avLst/>
@@ -11047,7 +11063,23 @@
                 </a:solidFill>
                 <a:latin typeface="Lexend"/>
               </a:rPr>
-              <a:t>Group 2 is Who Signs In.</a:t>
+              <a:t>ROLE (0-2) asks whether all of a business's staff have the same access, or</a:t>
+            </a:r>
+          </a:p>
+          <a:p>
+            <a:pPr algn="l">
+              <a:lnSpc>
+                <a:spcPts val="2600"/>
+              </a:lnSpc>
+            </a:pPr>
+            <a:r>
+              <a:rPr sz="2000" b="0">
+                <a:solidFill>
+                  <a:srgbClr val="756E65"/>
+                </a:solidFill>
+                <a:latin typeface="Lexend"/>
+              </a:rPr>
+              <a:t>different roles with different access.</a:t>
             </a:r>
           </a:p>
         </p:txBody>
@@ -11493,7 +11525,7 @@
                 </a:solidFill>
                 <a:latin typeface="Lexend"/>
               </a:rPr>
-              <a:t>Group 3 is Customers.</a:t>
+              <a:t>CUST (0-5) asks how far into a business's own customers the app goes.</a:t>
             </a:r>
           </a:p>
         </p:txBody>
@@ -12394,7 +12426,7 @@
                 </a:solidFill>
                 <a:latin typeface="Lexend"/>
               </a:rPr>
-              <a:t>Group 4 is Public.</a:t>
+              <a:t>VIEW (0-2) asks whether a stranger can read anything without signing in.</a:t>
             </a:r>
           </a:p>
         </p:txBody>
@@ -12759,7 +12791,7 @@
         </p:blipFill>
         <p:spPr>
           <a:xfrm>
-            <a:off x="609600" y="3185160"/>
+            <a:off x="609600" y="3020060"/>
             <a:ext cx="1016000" cy="1016000"/>
           </a:xfrm>
           <a:prstGeom prst="rect">
@@ -12775,7 +12807,7 @@
         </p:nvSpPr>
         <p:spPr>
           <a:xfrm>
-            <a:off x="2070100" y="3147060"/>
+            <a:off x="2070100" y="2981960"/>
             <a:ext cx="9563100" cy="619760"/>
           </a:xfrm>
           <a:prstGeom prst="rect">
@@ -12814,8 +12846,8 @@
         </p:nvSpPr>
         <p:spPr>
           <a:xfrm>
-            <a:off x="2070100" y="3931920"/>
-            <a:ext cx="9563100" cy="355600"/>
+            <a:off x="2070100" y="3766820"/>
+            <a:ext cx="9563100" cy="685800"/>
           </a:xfrm>
           <a:prstGeom prst="rect">
             <a:avLst/>
@@ -12840,7 +12872,23 @@
                 </a:solidFill>
                 <a:latin typeface="Lexend"/>
               </a:rPr>
-              <a:t>Do you need all 20 answers on day one?</a:t>
+              <a:t>Six codes are required, because the factory cannot judge an idea without</a:t>
+            </a:r>
+          </a:p>
+          <a:p>
+            <a:pPr algn="l">
+              <a:lnSpc>
+                <a:spcPts val="2600"/>
+              </a:lnSpc>
+            </a:pPr>
+            <a:r>
+              <a:rPr sz="2000" b="0">
+                <a:solidFill>
+                  <a:srgbClr val="756E65"/>
+                </a:solidFill>
+                <a:latin typeface="Lexend"/>
+              </a:rPr>
+              <a:t>them: TEN, CUST, SEN, VIEW, POST and PAY.</a:t>
             </a:r>
           </a:p>
         </p:txBody>
@@ -16673,7 +16721,7 @@
                 </a:solidFill>
                 <a:latin typeface="Lexend"/>
               </a:rPr>
-              <a:t>The second possible verdict is HOLD.</a:t>
+              <a:t>The engine suggests HOLD when SEN, the sensitivity code, is 2 or 3.</a:t>
             </a:r>
           </a:p>
         </p:txBody>
@@ -17038,7 +17086,7 @@
         </p:blipFill>
         <p:spPr>
           <a:xfrm>
-            <a:off x="609600" y="3185160"/>
+            <a:off x="609600" y="3020060"/>
             <a:ext cx="1016000" cy="1016000"/>
           </a:xfrm>
           <a:prstGeom prst="rect">
@@ -17054,7 +17102,7 @@
         </p:nvSpPr>
         <p:spPr>
           <a:xfrm>
-            <a:off x="2070100" y="3147060"/>
+            <a:off x="2070100" y="2981960"/>
             <a:ext cx="9563100" cy="619760"/>
           </a:xfrm>
           <a:prstGeom prst="rect">
@@ -17093,8 +17141,8 @@
         </p:nvSpPr>
         <p:spPr>
           <a:xfrm>
-            <a:off x="2070100" y="3931920"/>
-            <a:ext cx="9563100" cy="355600"/>
+            <a:off x="2070100" y="3766820"/>
+            <a:ext cx="9563100" cy="685800"/>
           </a:xfrm>
           <a:prstGeom prst="rect">
             <a:avLst/>
@@ -17119,7 +17167,23 @@
                 </a:solidFill>
                 <a:latin typeface="Lexend"/>
               </a:rPr>
-              <a:t>The third verdict is PASS.</a:t>
+              <a:t>An idea passes when no kill answer is yes and SEN is below 2, meaning the</a:t>
+            </a:r>
+          </a:p>
+          <a:p>
+            <a:pPr algn="l">
+              <a:lnSpc>
+                <a:spcPts val="2600"/>
+              </a:lnSpc>
+            </a:pPr>
+            <a:r>
+              <a:rPr sz="2000" b="0">
+                <a:solidFill>
+                  <a:srgbClr val="756E65"/>
+                </a:solidFill>
+                <a:latin typeface="Lexend"/>
+              </a:rPr>
+              <a:t>data is ordinary or personal, but not health and not children.</a:t>
             </a:r>
           </a:p>
         </p:txBody>
@@ -18392,7 +18456,7 @@
         </p:blipFill>
         <p:spPr>
           <a:xfrm>
-            <a:off x="609600" y="3185160"/>
+            <a:off x="609600" y="3020060"/>
             <a:ext cx="1016000" cy="1016000"/>
           </a:xfrm>
           <a:prstGeom prst="rect">
@@ -18408,7 +18472,7 @@
         </p:nvSpPr>
         <p:spPr>
           <a:xfrm>
-            <a:off x="2070100" y="3147060"/>
+            <a:off x="2070100" y="2981960"/>
             <a:ext cx="9563100" cy="619760"/>
           </a:xfrm>
           <a:prstGeom prst="rect">
@@ -18447,8 +18511,8 @@
         </p:nvSpPr>
         <p:spPr>
           <a:xfrm>
-            <a:off x="2070100" y="3931920"/>
-            <a:ext cx="9563100" cy="355600"/>
+            <a:off x="2070100" y="3766820"/>
+            <a:ext cx="9563100" cy="685800"/>
           </a:xfrm>
           <a:prstGeom prst="rect">
             <a:avLst/>
@@ -18473,7 +18537,23 @@
                 </a:solidFill>
                 <a:latin typeface="Lexend"/>
               </a:rPr>
-              <a:t>Why does the role matter so early?</a:t>
+              <a:t>Each role brings its own pack of checklist lines that the app must complete</a:t>
+            </a:r>
+          </a:p>
+          <a:p>
+            <a:pPr algn="l">
+              <a:lnSpc>
+                <a:spcPts val="2600"/>
+              </a:lnSpc>
+            </a:pPr>
+            <a:r>
+              <a:rPr sz="2000" b="0">
+                <a:solidFill>
+                  <a:srgbClr val="756E65"/>
+                </a:solidFill>
+                <a:latin typeface="Lexend"/>
+              </a:rPr>
+              <a:t>later.</a:t>
             </a:r>
           </a:p>
         </p:txBody>
@@ -21405,7 +21485,7 @@
                 </a:solidFill>
                 <a:latin typeface="Lexend"/>
               </a:rPr>
-              <a:t>Ideas can arrive through four doors.</a:t>
+              <a:t>The first is the Idea Form, filled in by a person with an idea.</a:t>
             </a:r>
           </a:p>
         </p:txBody>
@@ -21851,7 +21931,7 @@
                 </a:solidFill>
                 <a:latin typeface="Lexend"/>
               </a:rPr>
-              <a:t>Now the form itself.</a:t>
+              <a:t>It opens with a short name and a vision.</a:t>
             </a:r>
           </a:p>
         </p:txBody>
@@ -22216,7 +22296,7 @@
         </p:blipFill>
         <p:spPr>
           <a:xfrm>
-            <a:off x="609600" y="3185160"/>
+            <a:off x="609600" y="3020060"/>
             <a:ext cx="1016000" cy="1016000"/>
           </a:xfrm>
           <a:prstGeom prst="rect">
@@ -22232,7 +22312,7 @@
         </p:nvSpPr>
         <p:spPr>
           <a:xfrm>
-            <a:off x="2070100" y="3147060"/>
+            <a:off x="2070100" y="2981960"/>
             <a:ext cx="9563100" cy="619760"/>
           </a:xfrm>
           <a:prstGeom prst="rect">
@@ -22271,8 +22351,8 @@
         </p:nvSpPr>
         <p:spPr>
           <a:xfrm>
-            <a:off x="2070100" y="3931920"/>
-            <a:ext cx="9563100" cy="355600"/>
+            <a:off x="2070100" y="3766820"/>
+            <a:ext cx="9563100" cy="685800"/>
           </a:xfrm>
           <a:prstGeom prst="rect">
             <a:avLst/>
@@ -22297,7 +22377,23 @@
                 </a:solidFill>
                 <a:latin typeface="Lexend"/>
               </a:rPr>
-              <a:t>Next, the form asks who pays.</a:t>
+              <a:t>This means the person or business whose money keeps the app running, not</a:t>
+            </a:r>
+          </a:p>
+          <a:p>
+            <a:pPr algn="l">
+              <a:lnSpc>
+                <a:spcPts val="2600"/>
+              </a:lnSpc>
+            </a:pPr>
+            <a:r>
+              <a:rPr sz="2000" b="0">
+                <a:solidFill>
+                  <a:srgbClr val="756E65"/>
+                </a:solidFill>
+                <a:latin typeface="Lexend"/>
+              </a:rPr>
+              <a:t>just who uses it.</a:t>
             </a:r>
           </a:p>
         </p:txBody>
@@ -22662,7 +22758,7 @@
         </p:blipFill>
         <p:spPr>
           <a:xfrm>
-            <a:off x="609600" y="3185160"/>
+            <a:off x="609600" y="3020060"/>
             <a:ext cx="1016000" cy="1016000"/>
           </a:xfrm>
           <a:prstGeom prst="rect">
@@ -22678,7 +22774,7 @@
         </p:nvSpPr>
         <p:spPr>
           <a:xfrm>
-            <a:off x="2070100" y="3147060"/>
+            <a:off x="2070100" y="2981960"/>
             <a:ext cx="9563100" cy="619760"/>
           </a:xfrm>
           <a:prstGeom prst="rect">
@@ -22717,8 +22813,8 @@
         </p:nvSpPr>
         <p:spPr>
           <a:xfrm>
-            <a:off x="2070100" y="3931920"/>
-            <a:ext cx="9563100" cy="355600"/>
+            <a:off x="2070100" y="3766820"/>
+            <a:ext cx="9563100" cy="685800"/>
           </a:xfrm>
           <a:prstGeom prst="rect">
             <a:avLst/>
@@ -22743,7 +22839,23 @@
                 </a:solidFill>
                 <a:latin typeface="Lexend"/>
               </a:rPr>
-              <a:t>The third question is pain.</a:t>
+              <a:t>The pain is the problem the app removes, written the way the customer</a:t>
+            </a:r>
+          </a:p>
+          <a:p>
+            <a:pPr algn="l">
+              <a:lnSpc>
+                <a:spcPts val="2600"/>
+              </a:lnSpc>
+            </a:pPr>
+            <a:r>
+              <a:rPr sz="2000" b="0">
+                <a:solidFill>
+                  <a:srgbClr val="756E65"/>
+                </a:solidFill>
+                <a:latin typeface="Lexend"/>
+              </a:rPr>
+              <a:t>would say it.</a:t>
             </a:r>
           </a:p>
         </p:txBody>
